--- a/public/resources/pptx/post-pdhpe-s2.pptx
+++ b/public/resources/pptx/post-pdhpe-s2.pptx
@@ -8062,7 +8062,7 @@
                 </a:solidFill>
                 <a:latin typeface="Calibri"/>
               </a:rPr>
-              <a:t>Name one movement you saw an animal doing today. Why do you think it was moving that way?</a:t>
+              <a:t>Name one movement you saw an animal doing at Taronga Zoo. Why do you think it was moving that way?</a:t>
             </a:r>
           </a:p>
         </p:txBody>
